--- a/modern_metagame_analytics.pptx
+++ b/modern_metagame_analytics.pptx
@@ -300,26 +300,6 @@
           <a:bodyPr/>
           <a:lstStyle/>
           <a:p>
-            <a:r>
-              <a:rPr lang="it-IT" dirty="0"/>
-              <a:t>Il mio lavoro analizza il formato </a:t>
-            </a:r>
-            <a:r>
-              <a:rPr lang="it-IT" dirty="0" err="1"/>
-              <a:t>Modern</a:t>
-            </a:r>
-            <a:r>
-              <a:rPr lang="it-IT" dirty="0"/>
-              <a:t> di Magic attraverso i dati dei tornei, dal 2020 a oggi. Rispondo a tre domande: chi gioca cosa, cosa cambia con la </a:t>
-            </a:r>
-            <a:r>
-              <a:rPr lang="it-IT" dirty="0" err="1"/>
-              <a:t>banlist</a:t>
-            </a:r>
-            <a:r>
-              <a:rPr lang="it-IT" dirty="0"/>
-              <a:t> e chi vince davvero. Il dataset conta quasi 189 mila mazzi, raccolti da due fonti diverse. Il filo che attraversa tutta la presentazione è la differenza tra un mazzo popolare e un mazzo forte.</a:t>
-            </a:r>
             <a:endParaRPr lang="en-US" dirty="0"/>
           </a:p>
         </p:txBody>
@@ -404,46 +384,6 @@
           <a:bodyPr/>
           <a:lstStyle/>
           <a:p>
-            <a:r>
-              <a:rPr lang="en-US" dirty="0"/>
-              <a:t>(Grafico a barre </a:t>
-            </a:r>
-            <a:r>
-              <a:rPr lang="en-US" dirty="0" err="1"/>
-              <a:t>orizzontali</a:t>
-            </a:r>
-            <a:r>
-              <a:rPr lang="en-US" dirty="0"/>
-              <a:t>) </a:t>
-            </a:r>
-            <a:r>
-              <a:rPr lang="it-IT" dirty="0"/>
-              <a:t>In arancione le due carte poi bannate. </a:t>
-            </a:r>
-            <a:r>
-              <a:rPr lang="it-IT" dirty="0" err="1"/>
-              <a:t>Phlage</a:t>
-            </a:r>
-            <a:r>
-              <a:rPr lang="it-IT" dirty="0"/>
-              <a:t> è nel 12,6% dei mazzi, cioè uno su otto, e The One Ring nel 10%: entrambe erano tra le carte più giocate quando sono state vietate. Nel </a:t>
-            </a:r>
-            <a:r>
-              <a:rPr lang="it-IT" dirty="0" err="1"/>
-              <a:t>sideboard</a:t>
-            </a:r>
-            <a:r>
-              <a:rPr lang="it-IT" dirty="0"/>
-              <a:t> dominano le risposte mirate, come Mystical Dispute contro i mazzi blu e </a:t>
-            </a:r>
-            <a:r>
-              <a:rPr lang="it-IT" dirty="0" err="1"/>
-              <a:t>Consign</a:t>
-            </a:r>
-            <a:r>
-              <a:rPr lang="it-IT" dirty="0"/>
-              <a:t> to Memory contro le combo.</a:t>
-            </a:r>
             <a:endParaRPr lang="en-US" dirty="0"/>
           </a:p>
         </p:txBody>
@@ -529,73 +469,7 @@
           <a:lstStyle/>
           <a:p>
             <a:pPr rtl="0"/>
-            <a:r>
-              <a:rPr lang="it-IT" dirty="0"/>
-              <a:t>(Arrow chart: quota per archetipo, Era 9 contro Era 10) Ogni freccia va dalla quota di un archetipo prima del </a:t>
-            </a:r>
-            <a:r>
-              <a:rPr lang="it-IT" dirty="0" err="1"/>
-              <a:t>ban</a:t>
-            </a:r>
-            <a:r>
-              <a:rPr lang="it-IT" dirty="0"/>
-              <a:t> di </a:t>
-            </a:r>
-            <a:r>
-              <a:rPr lang="it-IT" dirty="0" err="1"/>
-              <a:t>Phlage</a:t>
-            </a:r>
-            <a:r>
-              <a:rPr lang="it-IT" dirty="0"/>
-              <a:t> a quella dopo. In verde chi guadagna, in arancione chi perde, ordinati per variazione. </a:t>
-            </a:r>
-            <a:r>
-              <a:rPr lang="it-IT" dirty="0" err="1"/>
-              <a:t>Phlage</a:t>
-            </a:r>
-            <a:r>
-              <a:rPr lang="it-IT" dirty="0"/>
-              <a:t> era la carta chiave sia di </a:t>
-            </a:r>
-            <a:r>
-              <a:rPr lang="it-IT" dirty="0" err="1"/>
-              <a:t>Jeskai</a:t>
-            </a:r>
-            <a:r>
-              <a:rPr lang="it-IT" dirty="0"/>
-              <a:t> Blink sia di Boros Energy. </a:t>
-            </a:r>
-            <a:r>
-              <a:rPr lang="it-IT" dirty="0" err="1"/>
-              <a:t>Jeskai</a:t>
-            </a:r>
-            <a:r>
-              <a:rPr lang="it-IT" dirty="0"/>
-              <a:t> Blink passa dal 4,2% allo 0,3%, un calo del 94%: di fatto scompare.</a:t>
-            </a:r>
-          </a:p>
-          <a:p>
-            <a:pPr rtl="0"/>
-            <a:r>
-              <a:rPr lang="it-IT" dirty="0"/>
-              <a:t>Boros Energy perde 6,4 punti, quasi metà della sua quota, ma resta il mazzo più giocato: il </a:t>
-            </a:r>
-            <a:r>
-              <a:rPr lang="it-IT" dirty="0" err="1"/>
-              <a:t>ban</a:t>
-            </a:r>
-            <a:r>
-              <a:rPr lang="it-IT" dirty="0"/>
-              <a:t> lo indebolisce senza eliminarlo. Il principale beneficiario è </a:t>
-            </a:r>
-            <a:r>
-              <a:rPr lang="it-IT" dirty="0" err="1"/>
-              <a:t>Goryo's</a:t>
-            </a:r>
-            <a:r>
-              <a:rPr lang="it-IT" dirty="0"/>
-              <a:t> Vengeance. Cautela: l'Era 10 dura finora solo tre mesi, quindi le quote recenti sono meno stabili.</a:t>
-            </a:r>
+            <a:endParaRPr lang="it-IT" dirty="0"/>
           </a:p>
         </p:txBody>
       </p:sp>
@@ -679,42 +553,6 @@
           <a:bodyPr/>
           <a:lstStyle/>
           <a:p>
-            <a:r>
-              <a:rPr lang="it-IT" dirty="0"/>
-              <a:t>(</a:t>
-            </a:r>
-            <a:r>
-              <a:rPr lang="it-IT" dirty="0" err="1"/>
-              <a:t>Heatmap</a:t>
-            </a:r>
-            <a:r>
-              <a:rPr lang="it-IT" dirty="0"/>
-              <a:t>: piazzamenti in top 3 al mese per era). Le ere durano da 3 a 14 mesi, quindi divido per la durata: altrimenti le ere lunghe sembrerebbero più importanti. Il riquadro arancione indica il leader di ogni era. Fino all'Era 6 è </a:t>
-            </a:r>
-            <a:r>
-              <a:rPr lang="it-IT" dirty="0" err="1"/>
-              <a:t>Yawgmoth</a:t>
-            </a:r>
-            <a:r>
-              <a:rPr lang="it-IT" dirty="0"/>
-              <a:t>, con un massimo di 22,4 piazzamenti al mese. Dall'Era 7 è sempre Boros Energy, che nell'Era 9 tocca 32,7 al mese, il valore più alto della serie. Nell'Era 10, dopo il </a:t>
-            </a:r>
-            <a:r>
-              <a:rPr lang="it-IT" dirty="0" err="1"/>
-              <a:t>ban</a:t>
-            </a:r>
-            <a:r>
-              <a:rPr lang="it-IT" dirty="0"/>
-              <a:t>, Affinity e </a:t>
-            </a:r>
-            <a:r>
-              <a:rPr lang="it-IT" dirty="0" err="1"/>
-              <a:t>Goryo's</a:t>
-            </a:r>
-            <a:r>
-              <a:rPr lang="it-IT" dirty="0"/>
-              <a:t> Vengeance arrivano quasi alla pari.</a:t>
-            </a:r>
             <a:endParaRPr lang="en-US" dirty="0"/>
           </a:p>
         </p:txBody>
@@ -799,50 +637,6 @@
           <a:bodyPr/>
           <a:lstStyle/>
           <a:p>
-            <a:r>
-              <a:rPr lang="it-IT" dirty="0"/>
-              <a:t>(Grafico a barre orizzontali e grafico a intervalli di confidenza: </a:t>
-            </a:r>
-            <a:r>
-              <a:rPr lang="it-IT" dirty="0" err="1"/>
-              <a:t>Violent</a:t>
-            </a:r>
-            <a:r>
-              <a:rPr lang="it-IT" dirty="0"/>
-              <a:t> </a:t>
-            </a:r>
-            <a:r>
-              <a:rPr lang="it-IT" dirty="0" err="1"/>
-              <a:t>Outburst</a:t>
-            </a:r>
-            <a:r>
-              <a:rPr lang="it-IT" dirty="0"/>
-              <a:t> e Living End) Nello stesso aggiornamento è stata </a:t>
-            </a:r>
-            <a:r>
-              <a:rPr lang="it-IT" dirty="0" err="1"/>
-              <a:t>sbannata</a:t>
-            </a:r>
-            <a:r>
-              <a:rPr lang="it-IT" dirty="0"/>
-              <a:t> </a:t>
-            </a:r>
-            <a:r>
-              <a:rPr lang="it-IT" dirty="0" err="1"/>
-              <a:t>Violent</a:t>
-            </a:r>
-            <a:r>
-              <a:rPr lang="it-IT" dirty="0"/>
-              <a:t> </a:t>
-            </a:r>
-            <a:r>
-              <a:rPr lang="it-IT" dirty="0" err="1"/>
-              <a:t>Outburst</a:t>
-            </a:r>
-            <a:r>
-              <a:rPr lang="it-IT" dirty="0"/>
-              <a:t>.</a:t>
-            </a:r>
             <a:endParaRPr lang="en-US" dirty="0"/>
           </a:p>
         </p:txBody>
@@ -927,10 +721,7 @@
           <a:bodyPr/>
           <a:lstStyle/>
           <a:p>
-            <a:r>
-              <a:rPr lang="en-US" dirty="0"/>
-              <a:t>Terza sezione: inferenziale.</a:t>
-            </a:r>
+            <a:endParaRPr lang="en-US" dirty="0"/>
           </a:p>
         </p:txBody>
       </p:sp>
@@ -1014,34 +805,6 @@
           <a:bodyPr/>
           <a:lstStyle/>
           <a:p>
-            <a:r>
-              <a:rPr lang="it-IT" dirty="0"/>
-              <a:t>(Forest plot: </a:t>
-            </a:r>
-            <a:r>
-              <a:rPr lang="it-IT" dirty="0" err="1"/>
-              <a:t>winrate</a:t>
-            </a:r>
-            <a:r>
-              <a:rPr lang="it-IT" dirty="0"/>
-              <a:t> con IC 95%) Il </a:t>
-            </a:r>
-            <a:r>
-              <a:rPr lang="it-IT" dirty="0" err="1"/>
-              <a:t>winrate</a:t>
-            </a:r>
-            <a:r>
-              <a:rPr lang="it-IT" dirty="0"/>
-              <a:t> nei Regional di ogni archetipo con almeno 300 partite. Il punto è il </a:t>
-            </a:r>
-            <a:r>
-              <a:rPr lang="it-IT" dirty="0" err="1"/>
-              <a:t>winrate</a:t>
-            </a:r>
-            <a:r>
-              <a:rPr lang="it-IT" dirty="0"/>
-              <a:t>, grande in proporzione alle partite. La barra è l'intervallo di confidenza al 95%, calcolato con il metodo di Wilson. Verde se l'intervallo sta tutto sopra il 50%, arancione se sta tutto sotto, grigio se lo include: in quel caso i dati non permettono di dire se il mazzo sia sopra o sotto la media.</a:t>
-            </a:r>
             <a:endParaRPr lang="en-US" dirty="0"/>
           </a:p>
         </p:txBody>
@@ -1127,73 +890,7 @@
           <a:lstStyle/>
           <a:p>
             <a:pPr rtl="0"/>
-            <a:r>
-              <a:rPr lang="it-IT" dirty="0"/>
-              <a:t>(Matrice dei </a:t>
-            </a:r>
-            <a:r>
-              <a:rPr lang="it-IT" dirty="0" err="1"/>
-              <a:t>matchup</a:t>
-            </a:r>
-            <a:r>
-              <a:rPr lang="it-IT" dirty="0"/>
-              <a:t>: </a:t>
-            </a:r>
-            <a:r>
-              <a:rPr lang="it-IT" dirty="0" err="1"/>
-              <a:t>heatmap</a:t>
-            </a:r>
-            <a:r>
-              <a:rPr lang="it-IT" dirty="0"/>
-              <a:t> divergente) Gli scontri diretti tra i dieci archetipi più giocati. Si legge per righe: ogni cella è il </a:t>
-            </a:r>
-            <a:r>
-              <a:rPr lang="it-IT" dirty="0" err="1"/>
-              <a:t>winrate</a:t>
-            </a:r>
-            <a:r>
-              <a:rPr lang="it-IT" dirty="0"/>
-              <a:t> del mazzo in riga contro quello in colonna. La scala è centrata sul 50%: verde vince, arancione perde, bianco equilibrio. Il grassetto indica un risultato significativo.</a:t>
-            </a:r>
-          </a:p>
-          <a:p>
-            <a:pPr rtl="0"/>
-            <a:r>
-              <a:rPr lang="it-IT" dirty="0"/>
-              <a:t>La riga di Izzet </a:t>
-            </a:r>
-            <a:r>
-              <a:rPr lang="it-IT" dirty="0" err="1"/>
-              <a:t>Prowess</a:t>
-            </a:r>
-            <a:r>
-              <a:rPr lang="it-IT" dirty="0"/>
-              <a:t> è quasi tutta arancione. Perde contro otto dei nove avversari principali e batte solo Belcher, con il 68%. Contro Boros Energy, </a:t>
-            </a:r>
-            <a:r>
-              <a:rPr lang="it-IT" dirty="0" err="1"/>
-              <a:t>Jeskai</a:t>
-            </a:r>
-            <a:r>
-              <a:rPr lang="it-IT" dirty="0"/>
-              <a:t> Blink e </a:t>
-            </a:r>
-            <a:r>
-              <a:rPr lang="it-IT" dirty="0" err="1"/>
-              <a:t>Goryo's</a:t>
-            </a:r>
-            <a:r>
-              <a:rPr lang="it-IT" dirty="0"/>
-              <a:t> Vengeance vince tra il 35% e il 40%. Proprio i mazzi che incontra più spesso. Con 90 celle qualche risultato estremo può comparire per caso, quindi leggo l'andamento della riga più che il singolo valore. (Il numero è in </a:t>
-            </a:r>
-            <a:r>
-              <a:rPr lang="it-IT" b="1" dirty="0"/>
-              <a:t>grassetto</a:t>
-            </a:r>
-            <a:r>
-              <a:rPr lang="it-IT" dirty="0"/>
-              <a:t> se l'intervallo sta tutto sopra o tutto sotto il 50%)</a:t>
-            </a:r>
+            <a:endParaRPr lang="it-IT" dirty="0"/>
           </a:p>
         </p:txBody>
       </p:sp>
@@ -1277,18 +974,6 @@
           <a:bodyPr/>
           <a:lstStyle/>
           <a:p>
-            <a:r>
-              <a:rPr lang="it-IT" dirty="0"/>
-              <a:t>(Dot plot con intervalli di confidenza: Regional contro Pro Tour) Confronto il </a:t>
-            </a:r>
-            <a:r>
-              <a:rPr lang="it-IT" dirty="0" err="1"/>
-              <a:t>winrate</a:t>
-            </a:r>
-            <a:r>
-              <a:rPr lang="it-IT" dirty="0"/>
-              <a:t> di ogni archetipo nei Regional, in blu scuro, e al Pro Tour, in arancione, usando i dati pubblicati da Frank Karsten. Boros Energy passa dal 53% al 44%, e i due intervalli non si sovrappongono. Il Pro Tour è su invito: gli avversari sono più forti e arrivano preparati proprio contro il mazzo da battere.</a:t>
-            </a:r>
             <a:endParaRPr lang="en-US" dirty="0"/>
           </a:p>
         </p:txBody>
@@ -1373,18 +1058,6 @@
           <a:bodyPr/>
           <a:lstStyle/>
           <a:p>
-            <a:r>
-              <a:rPr lang="it-IT" dirty="0"/>
-              <a:t>Il messaggio principale sta nei due mazzi che hanno attraversato tutta la presentazione. Boros Energy è il più popolare ed è forte nei Regional, ma il suo vantaggio non regge al Pro Tour. Izzet </a:t>
-            </a:r>
-            <a:r>
-              <a:rPr lang="it-IT" dirty="0" err="1"/>
-              <a:t>Prowess</a:t>
-            </a:r>
-            <a:r>
-              <a:rPr lang="it-IT" dirty="0"/>
-              <a:t> è il secondo mazzo dei Regional ed è l'unico che perde in modo significativo, eppure al Pro Tour recupera. Popolarità non è forza, e la forza di un mazzo dipende da chi ha di fronte.</a:t>
-            </a:r>
             <a:endParaRPr lang="en-US" dirty="0"/>
           </a:p>
         </p:txBody>
@@ -1469,26 +1142,6 @@
           <a:bodyPr/>
           <a:lstStyle/>
           <a:p>
-            <a:r>
-              <a:rPr lang="it-IT" dirty="0"/>
-              <a:t>Quattro limiti da tenere presenti. Primo: i dati incontro per incontro esistono solo da febbraio 2025, quindi non c'è un </a:t>
-            </a:r>
-            <a:r>
-              <a:rPr lang="it-IT" dirty="0" err="1"/>
-              <a:t>winrate</a:t>
-            </a:r>
-            <a:r>
-              <a:rPr lang="it-IT" dirty="0"/>
-              <a:t> per le ere precedenti. Secondo: </a:t>
-            </a:r>
-            <a:r>
-              <a:rPr lang="it-IT" dirty="0" err="1"/>
-              <a:t>MTGGoldfish</a:t>
-            </a:r>
-            <a:r>
-              <a:rPr lang="it-IT" dirty="0"/>
-              <a:t> registra solo piazzamenti, senza vittorie e sconfitte. Terzo: su melee.gg i nomi degli archetipi li scelgono i giocatori, quindi varianti dello stesso mazzo possono comparire separate. Quarto: l'Era 10 dura solo tre mesi e i numeri più recenti sono i meno stabili.</a:t>
-            </a:r>
             <a:endParaRPr lang="en-US" dirty="0"/>
           </a:p>
         </p:txBody>
@@ -1573,50 +1226,6 @@
           <a:bodyPr/>
           <a:lstStyle/>
           <a:p>
-            <a:r>
-              <a:rPr lang="it-IT" dirty="0"/>
-              <a:t>(Glossario a icone) Prima dei grafici, i concetti che servono per leggerli. A sinistra le regole del gioco: il mazzo, il formato </a:t>
-            </a:r>
-            <a:r>
-              <a:rPr lang="it-IT" dirty="0" err="1"/>
-              <a:t>Modern</a:t>
-            </a:r>
-            <a:r>
-              <a:rPr lang="it-IT" dirty="0"/>
-              <a:t>, l'incontro al meglio di tre partite, il torneo e la </a:t>
-            </a:r>
-            <a:r>
-              <a:rPr lang="it-IT" dirty="0" err="1"/>
-              <a:t>banlist</a:t>
-            </a:r>
-            <a:r>
-              <a:rPr lang="it-IT" dirty="0"/>
-              <a:t>. Ogni aggiornamento della </a:t>
-            </a:r>
-            <a:r>
-              <a:rPr lang="it-IT" dirty="0" err="1"/>
-              <a:t>banlist</a:t>
-            </a:r>
-            <a:r>
-              <a:rPr lang="it-IT" dirty="0"/>
-              <a:t> apre una nuova era. I termini usati nei grafici. I due più importanti sono il </a:t>
-            </a:r>
-            <a:r>
-              <a:rPr lang="it-IT" dirty="0" err="1"/>
-              <a:t>winrate</a:t>
-            </a:r>
-            <a:r>
-              <a:rPr lang="it-IT" dirty="0"/>
-              <a:t>, calcolato escludendo i pareggi, e l'intervallo di confidenza al 95%, che misura quanto è affidabile un </a:t>
-            </a:r>
-            <a:r>
-              <a:rPr lang="it-IT" dirty="0" err="1"/>
-              <a:t>winrate</a:t>
-            </a:r>
-            <a:r>
-              <a:rPr lang="it-IT" dirty="0"/>
-              <a:t>.</a:t>
-            </a:r>
             <a:endParaRPr lang="en-US" dirty="0"/>
           </a:p>
         </p:txBody>
@@ -1785,34 +1394,6 @@
           <a:bodyPr/>
           <a:lstStyle/>
           <a:p>
-            <a:r>
-              <a:rPr lang="it-IT" dirty="0"/>
-              <a:t>(Grafico a barre verticali: </a:t>
-            </a:r>
-            <a:r>
-              <a:rPr lang="it-IT" dirty="0" err="1"/>
-              <a:t>decklist</a:t>
-            </a:r>
-            <a:r>
-              <a:rPr lang="it-IT" dirty="0"/>
-              <a:t> </a:t>
-            </a:r>
-            <a:r>
-              <a:rPr lang="it-IT" dirty="0" err="1"/>
-              <a:t>MTGGoldfish</a:t>
-            </a:r>
-            <a:r>
-              <a:rPr lang="it-IT" dirty="0"/>
-              <a:t> per anno) Uso due fonti per i dati. A sinistra </a:t>
-            </a:r>
-            <a:r>
-              <a:rPr lang="it-IT" dirty="0" err="1"/>
-              <a:t>MTGGoldfish</a:t>
-            </a:r>
-            <a:r>
-              <a:rPr lang="it-IT" dirty="0"/>
-              <a:t>: dà volume e profondità storica, circa 182 mila mazzi dal 2020, per il 63% da tornei online su MTGO. Il limite è che registra solo il piazzamento, non vittorie e sconfitte. Il calo del 2026 dipende dall'anno ancora in corso, non da un minor numero di tornei.</a:t>
-            </a:r>
             <a:endParaRPr lang="en-US" dirty="0"/>
           </a:p>
         </p:txBody>
@@ -1897,10 +1478,7 @@
           <a:bodyPr/>
           <a:lstStyle/>
           <a:p>
-            <a:r>
-              <a:rPr lang="en-US" dirty="0"/>
-              <a:t>Ogni sezione risponde a una domanda. Le visualizzazioni sono scelte per rispondere a quella domanda, non per mostrare tutto il dataset.</a:t>
-            </a:r>
+            <a:endParaRPr lang="en-US" dirty="0"/>
           </a:p>
         </p:txBody>
       </p:sp>
@@ -2072,57 +1650,7 @@
           <a:lstStyle/>
           <a:p>
             <a:pPr rtl="0"/>
-            <a:r>
-              <a:rPr lang="it-IT" dirty="0"/>
-              <a:t>(</a:t>
-            </a:r>
-            <a:r>
-              <a:rPr lang="it-IT" dirty="0" err="1"/>
-              <a:t>Dumbbell</a:t>
-            </a:r>
-            <a:r>
-              <a:rPr lang="it-IT" dirty="0"/>
-              <a:t> plot: popolarità per fonte) Per ogni archetipo confronto la quota su </a:t>
-            </a:r>
-            <a:r>
-              <a:rPr lang="it-IT" dirty="0" err="1"/>
-              <a:t>MTGGoldfish</a:t>
-            </a:r>
-            <a:r>
-              <a:rPr lang="it-IT" dirty="0"/>
-              <a:t>, in grigio, e quella nei Regional dal vivo, in scuro, nello stesso periodo. Boros Energy è il mazzo più giocato in entrambe le fonti. Online è al 12,3%, quasi il doppio del secondo mazzo. Nei Regional scende al 7,3% e il distacco si riduce.</a:t>
-            </a:r>
-          </a:p>
-          <a:p>
-            <a:pPr rtl="0"/>
-            <a:r>
-              <a:rPr lang="it-IT" dirty="0"/>
-              <a:t>Le due fonti non vedono lo stesso formato. </a:t>
-            </a:r>
-            <a:r>
-              <a:rPr lang="it-IT" dirty="0" err="1"/>
-              <a:t>Jeskai</a:t>
-            </a:r>
-            <a:r>
-              <a:rPr lang="it-IT" dirty="0"/>
-              <a:t> Blink è quasi due volte più presente dal vivo, mentre </a:t>
-            </a:r>
-            <a:r>
-              <a:rPr lang="it-IT" dirty="0" err="1"/>
-              <a:t>Eldrazi</a:t>
-            </a:r>
-            <a:r>
-              <a:rPr lang="it-IT" dirty="0"/>
-              <a:t> Tron è tre volte meno presente. Segno anche Izzet </a:t>
-            </a:r>
-            <a:r>
-              <a:rPr lang="it-IT" dirty="0" err="1"/>
-              <a:t>Prowess</a:t>
-            </a:r>
-            <a:r>
-              <a:rPr lang="it-IT" dirty="0"/>
-              <a:t>: online è al 4,2%, ma nei Regional sale al 5,9% ed è il secondo mazzo più giocato. Chi gioca un torneo competitivo lo sceglie più spesso. Ci torno alla fine.</a:t>
-            </a:r>
+            <a:endParaRPr lang="it-IT" dirty="0"/>
           </a:p>
         </p:txBody>
       </p:sp>
@@ -2405,58 +1933,6 @@
           <a:bodyPr/>
           <a:lstStyle/>
           <a:p>
-            <a:r>
-              <a:rPr lang="it-IT" dirty="0"/>
-              <a:t>(Timeline della </a:t>
-            </a:r>
-            <a:r>
-              <a:rPr lang="it-IT" dirty="0" err="1"/>
-              <a:t>banlist</a:t>
-            </a:r>
-            <a:r>
-              <a:rPr lang="it-IT" dirty="0"/>
-              <a:t>) I nove aggiornamenti della </a:t>
-            </a:r>
-            <a:r>
-              <a:rPr lang="it-IT" dirty="0" err="1"/>
-              <a:t>banlist</a:t>
-            </a:r>
-            <a:r>
-              <a:rPr lang="it-IT" dirty="0"/>
-              <a:t> in cinque anni, con le carte colpite e la motivazione ufficiale. Le motivazioni ricorrenti sono due: una carta troppo presente, come </a:t>
-            </a:r>
-            <a:r>
-              <a:rPr lang="it-IT" dirty="0" err="1"/>
-              <a:t>Lurrus</a:t>
-            </a:r>
-            <a:r>
-              <a:rPr lang="it-IT" dirty="0"/>
-              <a:t> nel 31% dei mazzi vincenti o </a:t>
-            </a:r>
-            <a:r>
-              <a:rPr lang="it-IT" dirty="0" err="1"/>
-              <a:t>Jegantha</a:t>
-            </a:r>
-            <a:r>
-              <a:rPr lang="it-IT" dirty="0"/>
-              <a:t> nel 40%, oppure partite troppo lente o ripetitive. Ogni aggiornamento apre una nuova era, e le ere sono l'unità di tempo dei grafici successivi. In arancione l'ultimo aggiornamento, il </a:t>
-            </a:r>
-            <a:r>
-              <a:rPr lang="it-IT" dirty="0" err="1"/>
-              <a:t>ban</a:t>
-            </a:r>
-            <a:r>
-              <a:rPr lang="it-IT" dirty="0"/>
-              <a:t> di </a:t>
-            </a:r>
-            <a:r>
-              <a:rPr lang="it-IT" dirty="0" err="1"/>
-              <a:t>Phlage</a:t>
-            </a:r>
-            <a:r>
-              <a:rPr lang="it-IT" dirty="0"/>
-              <a:t> del 18 maggio 2026</a:t>
-            </a:r>
             <a:endParaRPr lang="en-US" dirty="0"/>
           </a:p>
         </p:txBody>
